--- a/Entregaveis/Apresentação Final_ EC_Sprint_4_2TSCOA_A_EYEHORUS.pptx
+++ b/Entregaveis/Apresentação Final_ EC_Sprint_4_2TSCOA_A_EYEHORUS.pptx
@@ -243,7 +243,7 @@
           <a:p>
             <a:fld id="{C6919A36-4FB8-4E59-AAC8-C0370F692176}" type="datetimeFigureOut">
               <a:rPr lang="pt-BR" smtClean="0"/>
-              <a:t>22/09/2026</a:t>
+              <a:t>23/09/2026</a:t>
             </a:fld>
             <a:endParaRPr lang="pt-BR"/>
           </a:p>
@@ -1633,7 +1633,7 @@
           <a:p>
             <a:fld id="{5BCAD085-E8A6-8845-BD4E-CB4CCA059FC4}" type="datetimeFigureOut">
               <a:rPr lang="en-US" smtClean="0"/>
-              <a:t>9/22/2026</a:t>
+              <a:t>9/23/2026</a:t>
             </a:fld>
             <a:endParaRPr lang="en-US"/>
           </a:p>
@@ -1801,7 +1801,7 @@
           <a:p>
             <a:fld id="{5BCAD085-E8A6-8845-BD4E-CB4CCA059FC4}" type="datetimeFigureOut">
               <a:rPr lang="en-US" smtClean="0"/>
-              <a:t>9/22/2026</a:t>
+              <a:t>9/23/2026</a:t>
             </a:fld>
             <a:endParaRPr lang="en-US"/>
           </a:p>
@@ -1979,7 +1979,7 @@
           <a:p>
             <a:fld id="{5BCAD085-E8A6-8845-BD4E-CB4CCA059FC4}" type="datetimeFigureOut">
               <a:rPr lang="en-US" smtClean="0"/>
-              <a:t>9/22/2026</a:t>
+              <a:t>9/23/2026</a:t>
             </a:fld>
             <a:endParaRPr lang="en-US"/>
           </a:p>
@@ -2147,7 +2147,7 @@
           <a:p>
             <a:fld id="{5BCAD085-E8A6-8845-BD4E-CB4CCA059FC4}" type="datetimeFigureOut">
               <a:rPr lang="en-US" smtClean="0"/>
-              <a:t>9/22/2026</a:t>
+              <a:t>9/23/2026</a:t>
             </a:fld>
             <a:endParaRPr lang="en-US"/>
           </a:p>
@@ -2392,7 +2392,7 @@
           <a:p>
             <a:fld id="{5BCAD085-E8A6-8845-BD4E-CB4CCA059FC4}" type="datetimeFigureOut">
               <a:rPr lang="en-US" smtClean="0"/>
-              <a:t>9/22/2026</a:t>
+              <a:t>9/23/2026</a:t>
             </a:fld>
             <a:endParaRPr lang="en-US"/>
           </a:p>
@@ -2677,7 +2677,7 @@
           <a:p>
             <a:fld id="{5BCAD085-E8A6-8845-BD4E-CB4CCA059FC4}" type="datetimeFigureOut">
               <a:rPr lang="en-US" smtClean="0"/>
-              <a:t>9/22/2026</a:t>
+              <a:t>9/23/2026</a:t>
             </a:fld>
             <a:endParaRPr lang="en-US"/>
           </a:p>
@@ -3096,7 +3096,7 @@
           <a:p>
             <a:fld id="{5BCAD085-E8A6-8845-BD4E-CB4CCA059FC4}" type="datetimeFigureOut">
               <a:rPr lang="en-US" smtClean="0"/>
-              <a:t>9/22/2026</a:t>
+              <a:t>9/23/2026</a:t>
             </a:fld>
             <a:endParaRPr lang="en-US"/>
           </a:p>
@@ -3213,7 +3213,7 @@
           <a:p>
             <a:fld id="{5BCAD085-E8A6-8845-BD4E-CB4CCA059FC4}" type="datetimeFigureOut">
               <a:rPr lang="en-US" smtClean="0"/>
-              <a:t>9/22/2026</a:t>
+              <a:t>9/23/2026</a:t>
             </a:fld>
             <a:endParaRPr lang="en-US"/>
           </a:p>
@@ -3308,7 +3308,7 @@
           <a:p>
             <a:fld id="{5BCAD085-E8A6-8845-BD4E-CB4CCA059FC4}" type="datetimeFigureOut">
               <a:rPr lang="en-US" smtClean="0"/>
-              <a:t>9/22/2026</a:t>
+              <a:t>9/23/2026</a:t>
             </a:fld>
             <a:endParaRPr lang="en-US"/>
           </a:p>
@@ -3583,7 +3583,7 @@
           <a:p>
             <a:fld id="{5BCAD085-E8A6-8845-BD4E-CB4CCA059FC4}" type="datetimeFigureOut">
               <a:rPr lang="en-US" smtClean="0"/>
-              <a:t>9/22/2026</a:t>
+              <a:t>9/23/2026</a:t>
             </a:fld>
             <a:endParaRPr lang="en-US"/>
           </a:p>
@@ -3835,7 +3835,7 @@
           <a:p>
             <a:fld id="{5BCAD085-E8A6-8845-BD4E-CB4CCA059FC4}" type="datetimeFigureOut">
               <a:rPr lang="en-US" smtClean="0"/>
-              <a:t>9/22/2026</a:t>
+              <a:t>9/23/2026</a:t>
             </a:fld>
             <a:endParaRPr lang="en-US"/>
           </a:p>
@@ -4046,7 +4046,7 @@
           <a:p>
             <a:fld id="{5BCAD085-E8A6-8845-BD4E-CB4CCA059FC4}" type="datetimeFigureOut">
               <a:rPr lang="en-US" smtClean="0"/>
-              <a:t>9/22/2026</a:t>
+              <a:t>9/23/2026</a:t>
             </a:fld>
             <a:endParaRPr lang="en-US"/>
           </a:p>
@@ -9120,8 +9120,24 @@
                 </a:solidFill>
                 <a:latin typeface="Segoe UI"/>
               </a:rPr>
-              <a:t> [Link]</a:t>
-            </a:r>
+              <a:t> </a:t>
+            </a:r>
+            <a:r>
+              <a:rPr sz="1200" b="0" i="0" u="none" dirty="0">
+                <a:solidFill>
+                  <a:srgbClr val="E53E3E"/>
+                </a:solidFill>
+                <a:latin typeface="Segoe UI"/>
+                <a:hlinkClick r:id="rId8"/>
+              </a:rPr>
+              <a:t>[Link]</a:t>
+            </a:r>
+            <a:endParaRPr sz="1200" b="0" i="0" u="none" dirty="0">
+              <a:solidFill>
+                <a:srgbClr val="E53E3E"/>
+              </a:solidFill>
+              <a:latin typeface="Segoe UI"/>
+            </a:endParaRPr>
           </a:p>
         </p:txBody>
       </p:sp>
